--- a/classes/parte-5-explotacion-de-sistemas-y-binarios/125-vulnerabilidades-de-format-string/clase-125-presentacion.pptx
+++ b/classes/parte-5-explotacion-de-sistemas-y-binarios/125-vulnerabilidades-de-format-string/clase-125-presentacion.pptx
@@ -17,6 +17,9 @@
     <p:sldId id="265" r:id="rId16"/>
     <p:sldId id="266" r:id="rId17"/>
     <p:sldId id="267" r:id="rId18"/>
+    <p:sldId id="268" r:id="rId19"/>
+    <p:sldId id="269" r:id="rId20"/>
+    <p:sldId id="270" r:id="rId21"/>
   </p:sldIdLst>
   <p:sldSz cx="9144000" cy="6858000" type="screen4x3"/>
   <p:notesSz cx="6858000" cy="9144000"/>
@@ -3198,7 +3201,7 @@
                   <a:srgbClr val="0B3D2E"/>
                 </a:solidFill>
               </a:rPr>
-              <a:t>⚠️ Errores comunes</a:t>
+              <a:t>✍️ Ejercicios</a:t>
             </a:r>
           </a:p>
         </p:txBody>
@@ -3236,67 +3239,82 @@
                   <a:srgbClr val="22282E"/>
                 </a:solidFill>
               </a:rPr>
-              <a:t>•  %p imprime el texto literal — No es vulnerable, o printf recibe formato fijo</a:t>
-            </a:r>
-          </a:p>
-          <a:p>
-            <a:pPr>
-              <a:spcAft>
-                <a:spcPts val="600"/>
-              </a:spcAft>
-            </a:pPr>
-            <a:r>
-              <a:rPr sz="1500">
-                <a:solidFill>
-                  <a:srgbClr val="22282E"/>
-                </a:solidFill>
-              </a:rPr>
-              <a:t>•  Offset incorrecto — Recuenta con %N$p; considera alineación del buffer</a:t>
-            </a:r>
-          </a:p>
-          <a:p>
-            <a:pPr>
-              <a:spcAft>
-                <a:spcPts val="600"/>
-              </a:spcAft>
-            </a:pPr>
-            <a:r>
-              <a:rPr sz="1500">
-                <a:solidFill>
-                  <a:srgbClr val="22282E"/>
-                </a:solidFill>
-              </a:rPr>
-              <a:t>•  %n provoca crash — La dirección destino no es escribible o FORTIFY lo bloquea</a:t>
-            </a:r>
-          </a:p>
-          <a:p>
-            <a:pPr>
-              <a:spcAft>
-                <a:spcPts val="600"/>
-              </a:spcAft>
-            </a:pPr>
-            <a:r>
-              <a:rPr sz="1500">
-                <a:solidFill>
-                  <a:srgbClr val="22282E"/>
-                </a:solidFill>
-              </a:rPr>
-              <a:t>•  Escritura enorme y lenta — Usa %hn/%hhn para escrituras parciales</a:t>
-            </a:r>
-          </a:p>
-          <a:p>
-            <a:pPr>
-              <a:spcAft>
-                <a:spcPts val="600"/>
-              </a:spcAft>
-            </a:pPr>
-            <a:r>
-              <a:rPr sz="1500">
-                <a:solidFill>
-                  <a:srgbClr val="22282E"/>
-                </a:solidFill>
-              </a:rPr>
-              <a:t>•  Valor escrito equivocado — El contador de printf no coincide; ajusta el ancho</a:t>
+              <a:t>•  Determina el offset del argumento controlado en tu binario.</a:t>
+            </a:r>
+          </a:p>
+          <a:p>
+            <a:pPr>
+              <a:spcAft>
+                <a:spcPts val="600"/>
+              </a:spcAft>
+            </a:pPr>
+            <a:r>
+              <a:rPr sz="1500">
+                <a:solidFill>
+                  <a:srgbClr val="22282E"/>
+                </a:solidFill>
+              </a:rPr>
+              <a:t>•  Filtra el stack canary de un binario con canary usando %p.</a:t>
+            </a:r>
+          </a:p>
+          <a:p>
+            <a:pPr>
+              <a:spcAft>
+                <a:spcPts val="600"/>
+              </a:spcAft>
+            </a:pPr>
+            <a:r>
+              <a:rPr sz="1500">
+                <a:solidFill>
+                  <a:srgbClr val="22282E"/>
+                </a:solidFill>
+              </a:rPr>
+              <a:t>•  Escribe el valor 0xdeadbeef en una variable global con %n.</a:t>
+            </a:r>
+          </a:p>
+          <a:p>
+            <a:pPr>
+              <a:spcAft>
+                <a:spcPts val="600"/>
+              </a:spcAft>
+            </a:pPr>
+            <a:r>
+              <a:rPr sz="1500">
+                <a:solidFill>
+                  <a:srgbClr val="22282E"/>
+                </a:solidFill>
+              </a:rPr>
+              <a:t>•  Sobrescribe la GOT de puts con la dirección de win.</a:t>
+            </a:r>
+          </a:p>
+          <a:p>
+            <a:pPr>
+              <a:spcAft>
+                <a:spcPts val="600"/>
+              </a:spcAft>
+            </a:pPr>
+            <a:r>
+              <a:rPr sz="1500">
+                <a:solidFill>
+                  <a:srgbClr val="22282E"/>
+                </a:solidFill>
+              </a:rPr>
+              <a:t>•  Compara payload manual vs fmtstrpayload.</a:t>
+            </a:r>
+          </a:p>
+          <a:p>
+            <a:pPr>
+              <a:spcAft>
+                <a:spcPts val="600"/>
+              </a:spcAft>
+            </a:pPr>
+            <a:r>
+              <a:rPr sz="1500">
+                <a:solidFill>
+                  <a:srgbClr val="22282E"/>
+                </a:solidFill>
+              </a:rPr>
+              <a:t>•  Recompila con -DFORTIFYSOURCE=2 -O2 y explica qué cambia.</a:t>
             </a:r>
           </a:p>
         </p:txBody>
@@ -3347,7 +3365,7 @@
                   <a:srgbClr val="0B3D2E"/>
                 </a:solidFill>
               </a:rPr>
-              <a:t>❓ Preguntas frecuentes</a:t>
+              <a:t>📝 Reto verificable</a:t>
             </a:r>
           </a:p>
         </p:txBody>
@@ -3385,82 +3403,52 @@
                   <a:srgbClr val="22282E"/>
                 </a:solidFill>
               </a:rPr>
-              <a:t>•  ❓ ¿Por qué %n es tan peligroso? Porque convierte una función de impresión en una primitiva de</a:t>
-            </a:r>
-          </a:p>
-          <a:p>
-            <a:pPr>
-              <a:spcAft>
-                <a:spcPts val="600"/>
-              </a:spcAft>
-            </a:pPr>
-            <a:r>
-              <a:rPr sz="1500">
-                <a:solidFill>
-                  <a:srgbClr val="22282E"/>
-                </a:solidFill>
-              </a:rPr>
-              <a:t>•  escritura arbitraria de memoria.</a:t>
-            </a:r>
-          </a:p>
-          <a:p>
-            <a:pPr>
-              <a:spcAft>
-                <a:spcPts val="600"/>
-              </a:spcAft>
-            </a:pPr>
-            <a:r>
-              <a:rPr sz="1500">
-                <a:solidFill>
-                  <a:srgbClr val="22282E"/>
-                </a:solidFill>
-              </a:rPr>
-              <a:t>•  ❓ ¿Sigue apareciendo este bug? Sí, sobre todo en C legacy y logging; -Wformat-security ayuda a</a:t>
-            </a:r>
-          </a:p>
-          <a:p>
-            <a:pPr>
-              <a:spcAft>
-                <a:spcPts val="600"/>
-              </a:spcAft>
-            </a:pPr>
-            <a:r>
-              <a:rPr sz="1500">
-                <a:solidFill>
-                  <a:srgbClr val="22282E"/>
-                </a:solidFill>
-              </a:rPr>
-              <a:t>•  detectarlo en compilación.</a:t>
-            </a:r>
-          </a:p>
-          <a:p>
-            <a:pPr>
-              <a:spcAft>
-                <a:spcPts val="600"/>
-              </a:spcAft>
-            </a:pPr>
-            <a:r>
-              <a:rPr sz="1500">
-                <a:solidFill>
-                  <a:srgbClr val="22282E"/>
-                </a:solidFill>
-              </a:rPr>
-              <a:t>•  ❓ ¿Puedo leer y escribir en el mismo payload? Sí, combinando %s/%p (lectura) con %n</a:t>
-            </a:r>
-          </a:p>
-          <a:p>
-            <a:pPr>
-              <a:spcAft>
-                <a:spcPts val="600"/>
-              </a:spcAft>
-            </a:pPr>
-            <a:r>
-              <a:rPr sz="1500">
-                <a:solidFill>
-                  <a:srgbClr val="22282E"/>
-                </a:solidFill>
-              </a:rPr>
-              <a:t>•  (escritura), aunque suele dividirse en fases.</a:t>
+              <a:t>•  Entrega un exploit que, mediante una única cadena de formato, sobrescriba una entrada de la GOT para</a:t>
+            </a:r>
+          </a:p>
+          <a:p>
+            <a:pPr>
+              <a:spcAft>
+                <a:spcPts val="600"/>
+              </a:spcAft>
+            </a:pPr>
+            <a:r>
+              <a:rPr sz="1500">
+                <a:solidFill>
+                  <a:srgbClr val="22282E"/>
+                </a:solidFill>
+              </a:rPr>
+              <a:t>•  desviar la ejecución a win().</a:t>
+            </a:r>
+          </a:p>
+          <a:p>
+            <a:pPr>
+              <a:spcAft>
+                <a:spcPts val="600"/>
+              </a:spcAft>
+            </a:pPr>
+            <a:r>
+              <a:rPr sz="1500">
+                <a:solidFill>
+                  <a:srgbClr val="22282E"/>
+                </a:solidFill>
+              </a:rPr>
+              <a:t>•  Criterio de aceptación: al ejecutar el binario con tu entrada, se llama a win() (mensaje visible),</a:t>
+            </a:r>
+          </a:p>
+          <a:p>
+            <a:pPr>
+              <a:spcAft>
+                <a:spcPts val="600"/>
+              </a:spcAft>
+            </a:pPr>
+            <a:r>
+              <a:rPr sz="1500">
+                <a:solidFill>
+                  <a:srgbClr val="22282E"/>
+                </a:solidFill>
+              </a:rPr>
+              <a:t>•  y muestras en GDB la entrada GOT modificada.</a:t>
             </a:r>
           </a:p>
         </p:txBody>
@@ -3511,7 +3499,7 @@
                   <a:srgbClr val="0B3D2E"/>
                 </a:solidFill>
               </a:rPr>
-              <a:t>🔗 Referencias</a:t>
+              <a:t>⚠️ Errores comunes</a:t>
             </a:r>
           </a:p>
         </p:txBody>
@@ -3549,6 +3537,319 @@
                   <a:srgbClr val="22282E"/>
                 </a:solidFill>
               </a:rPr>
+              <a:t>•  %p imprime el texto literal — No es vulnerable, o printf recibe formato fijo</a:t>
+            </a:r>
+          </a:p>
+          <a:p>
+            <a:pPr>
+              <a:spcAft>
+                <a:spcPts val="600"/>
+              </a:spcAft>
+            </a:pPr>
+            <a:r>
+              <a:rPr sz="1500">
+                <a:solidFill>
+                  <a:srgbClr val="22282E"/>
+                </a:solidFill>
+              </a:rPr>
+              <a:t>•  Offset incorrecto — Recuenta con %N$p; considera alineación del buffer</a:t>
+            </a:r>
+          </a:p>
+          <a:p>
+            <a:pPr>
+              <a:spcAft>
+                <a:spcPts val="600"/>
+              </a:spcAft>
+            </a:pPr>
+            <a:r>
+              <a:rPr sz="1500">
+                <a:solidFill>
+                  <a:srgbClr val="22282E"/>
+                </a:solidFill>
+              </a:rPr>
+              <a:t>•  %n provoca crash — La dirección destino no es escribible o FORTIFY lo bloquea</a:t>
+            </a:r>
+          </a:p>
+          <a:p>
+            <a:pPr>
+              <a:spcAft>
+                <a:spcPts val="600"/>
+              </a:spcAft>
+            </a:pPr>
+            <a:r>
+              <a:rPr sz="1500">
+                <a:solidFill>
+                  <a:srgbClr val="22282E"/>
+                </a:solidFill>
+              </a:rPr>
+              <a:t>•  Escritura enorme y lenta — Usa %hn/%hhn para escrituras parciales</a:t>
+            </a:r>
+          </a:p>
+          <a:p>
+            <a:pPr>
+              <a:spcAft>
+                <a:spcPts val="600"/>
+              </a:spcAft>
+            </a:pPr>
+            <a:r>
+              <a:rPr sz="1500">
+                <a:solidFill>
+                  <a:srgbClr val="22282E"/>
+                </a:solidFill>
+              </a:rPr>
+              <a:t>•  Valor escrito equivocado — El contador de printf no coincide; ajusta el ancho</a:t>
+            </a:r>
+          </a:p>
+        </p:txBody>
+      </p:sp>
+    </p:spTree>
+  </p:cSld>
+  <p:clrMapOvr>
+    <a:masterClrMapping/>
+  </p:clrMapOvr>
+</p:sld>
+</file>
+
+<file path=ppt/slides/slide13.xml><?xml version="1.0" encoding="utf-8"?>
+<p:sld xmlns:a="http://schemas.openxmlformats.org/drawingml/2006/main" xmlns:p="http://schemas.openxmlformats.org/presentationml/2006/main" xmlns:r="http://schemas.openxmlformats.org/officeDocument/2006/relationships">
+  <p:cSld>
+    <p:spTree>
+      <p:nvGrpSpPr>
+        <p:cNvPr id="1" name=""/>
+        <p:cNvGrpSpPr/>
+        <p:nvPr/>
+      </p:nvGrpSpPr>
+      <p:grpSpPr/>
+      <p:sp>
+        <p:nvSpPr>
+          <p:cNvPr id="2" name="TextBox 1"/>
+          <p:cNvSpPr txBox="1"/>
+          <p:nvPr/>
+        </p:nvSpPr>
+        <p:spPr>
+          <a:xfrm>
+            <a:off x="457200" y="320040"/>
+            <a:ext cx="8229600" cy="822960"/>
+          </a:xfrm>
+          <a:prstGeom prst="rect">
+            <a:avLst/>
+          </a:prstGeom>
+          <a:noFill/>
+        </p:spPr>
+        <p:txBody>
+          <a:bodyPr wrap="square">
+            <a:spAutoFit/>
+          </a:bodyPr>
+          <a:lstStyle/>
+          <a:p>
+            <a:r>
+              <a:rPr sz="2600" b="1">
+                <a:solidFill>
+                  <a:srgbClr val="0B3D2E"/>
+                </a:solidFill>
+              </a:rPr>
+              <a:t>❓ Preguntas frecuentes</a:t>
+            </a:r>
+          </a:p>
+        </p:txBody>
+      </p:sp>
+      <p:sp>
+        <p:nvSpPr>
+          <p:cNvPr id="3" name="TextBox 2"/>
+          <p:cNvSpPr txBox="1"/>
+          <p:nvPr/>
+        </p:nvSpPr>
+        <p:spPr>
+          <a:xfrm>
+            <a:off x="457200" y="1280160"/>
+            <a:ext cx="8229600" cy="4937760"/>
+          </a:xfrm>
+          <a:prstGeom prst="rect">
+            <a:avLst/>
+          </a:prstGeom>
+          <a:noFill/>
+        </p:spPr>
+        <p:txBody>
+          <a:bodyPr wrap="square">
+            <a:spAutoFit/>
+          </a:bodyPr>
+          <a:lstStyle/>
+          <a:p>
+            <a:pPr>
+              <a:spcAft>
+                <a:spcPts val="600"/>
+              </a:spcAft>
+            </a:pPr>
+            <a:r>
+              <a:rPr sz="1500">
+                <a:solidFill>
+                  <a:srgbClr val="22282E"/>
+                </a:solidFill>
+              </a:rPr>
+              <a:t>•  ❓ ¿Por qué %n es tan peligroso? Porque convierte una función de impresión en una primitiva de</a:t>
+            </a:r>
+          </a:p>
+          <a:p>
+            <a:pPr>
+              <a:spcAft>
+                <a:spcPts val="600"/>
+              </a:spcAft>
+            </a:pPr>
+            <a:r>
+              <a:rPr sz="1500">
+                <a:solidFill>
+                  <a:srgbClr val="22282E"/>
+                </a:solidFill>
+              </a:rPr>
+              <a:t>•  escritura arbitraria de memoria.</a:t>
+            </a:r>
+          </a:p>
+          <a:p>
+            <a:pPr>
+              <a:spcAft>
+                <a:spcPts val="600"/>
+              </a:spcAft>
+            </a:pPr>
+            <a:r>
+              <a:rPr sz="1500">
+                <a:solidFill>
+                  <a:srgbClr val="22282E"/>
+                </a:solidFill>
+              </a:rPr>
+              <a:t>•  ❓ ¿Sigue apareciendo este bug? Sí, sobre todo en C legacy y logging; -Wformat-security ayuda a</a:t>
+            </a:r>
+          </a:p>
+          <a:p>
+            <a:pPr>
+              <a:spcAft>
+                <a:spcPts val="600"/>
+              </a:spcAft>
+            </a:pPr>
+            <a:r>
+              <a:rPr sz="1500">
+                <a:solidFill>
+                  <a:srgbClr val="22282E"/>
+                </a:solidFill>
+              </a:rPr>
+              <a:t>•  detectarlo en compilación.</a:t>
+            </a:r>
+          </a:p>
+          <a:p>
+            <a:pPr>
+              <a:spcAft>
+                <a:spcPts val="600"/>
+              </a:spcAft>
+            </a:pPr>
+            <a:r>
+              <a:rPr sz="1500">
+                <a:solidFill>
+                  <a:srgbClr val="22282E"/>
+                </a:solidFill>
+              </a:rPr>
+              <a:t>•  ❓ ¿Puedo leer y escribir en el mismo payload? Sí, combinando %s/%p (lectura) con %n</a:t>
+            </a:r>
+          </a:p>
+          <a:p>
+            <a:pPr>
+              <a:spcAft>
+                <a:spcPts val="600"/>
+              </a:spcAft>
+            </a:pPr>
+            <a:r>
+              <a:rPr sz="1500">
+                <a:solidFill>
+                  <a:srgbClr val="22282E"/>
+                </a:solidFill>
+              </a:rPr>
+              <a:t>•  (escritura), aunque suele dividirse en fases.</a:t>
+            </a:r>
+          </a:p>
+        </p:txBody>
+      </p:sp>
+    </p:spTree>
+  </p:cSld>
+  <p:clrMapOvr>
+    <a:masterClrMapping/>
+  </p:clrMapOvr>
+</p:sld>
+</file>
+
+<file path=ppt/slides/slide14.xml><?xml version="1.0" encoding="utf-8"?>
+<p:sld xmlns:a="http://schemas.openxmlformats.org/drawingml/2006/main" xmlns:p="http://schemas.openxmlformats.org/presentationml/2006/main" xmlns:r="http://schemas.openxmlformats.org/officeDocument/2006/relationships">
+  <p:cSld>
+    <p:spTree>
+      <p:nvGrpSpPr>
+        <p:cNvPr id="1" name=""/>
+        <p:cNvGrpSpPr/>
+        <p:nvPr/>
+      </p:nvGrpSpPr>
+      <p:grpSpPr/>
+      <p:sp>
+        <p:nvSpPr>
+          <p:cNvPr id="2" name="TextBox 1"/>
+          <p:cNvSpPr txBox="1"/>
+          <p:nvPr/>
+        </p:nvSpPr>
+        <p:spPr>
+          <a:xfrm>
+            <a:off x="457200" y="320040"/>
+            <a:ext cx="8229600" cy="822960"/>
+          </a:xfrm>
+          <a:prstGeom prst="rect">
+            <a:avLst/>
+          </a:prstGeom>
+          <a:noFill/>
+        </p:spPr>
+        <p:txBody>
+          <a:bodyPr wrap="square">
+            <a:spAutoFit/>
+          </a:bodyPr>
+          <a:lstStyle/>
+          <a:p>
+            <a:r>
+              <a:rPr sz="2600" b="1">
+                <a:solidFill>
+                  <a:srgbClr val="0B3D2E"/>
+                </a:solidFill>
+              </a:rPr>
+              <a:t>🔗 Referencias</a:t>
+            </a:r>
+          </a:p>
+        </p:txBody>
+      </p:sp>
+      <p:sp>
+        <p:nvSpPr>
+          <p:cNvPr id="3" name="TextBox 2"/>
+          <p:cNvSpPr txBox="1"/>
+          <p:nvPr/>
+        </p:nvSpPr>
+        <p:spPr>
+          <a:xfrm>
+            <a:off x="457200" y="1280160"/>
+            <a:ext cx="8229600" cy="4937760"/>
+          </a:xfrm>
+          <a:prstGeom prst="rect">
+            <a:avLst/>
+          </a:prstGeom>
+          <a:noFill/>
+        </p:spPr>
+        <p:txBody>
+          <a:bodyPr wrap="square">
+            <a:spAutoFit/>
+          </a:bodyPr>
+          <a:lstStyle/>
+          <a:p>
+            <a:pPr>
+              <a:spcAft>
+                <a:spcPts val="600"/>
+              </a:spcAft>
+            </a:pPr>
+            <a:r>
+              <a:rPr sz="1500">
+                <a:solidFill>
+                  <a:srgbClr val="22282E"/>
+                </a:solidFill>
+              </a:rPr>
               <a:t>•  CWE-134: Use of Externally-Controlled Format String — &lt;https://cwe.mitre.org/data/definitions/134.html&gt;</a:t>
             </a:r>
           </a:p>
@@ -3599,6 +3900,81 @@
           </a:p>
         </p:txBody>
       </p:sp>
+    </p:spTree>
+  </p:cSld>
+  <p:clrMapOvr>
+    <a:masterClrMapping/>
+  </p:clrMapOvr>
+</p:sld>
+</file>
+
+<file path=ppt/slides/slide15.xml><?xml version="1.0" encoding="utf-8"?>
+<p:sld xmlns:a="http://schemas.openxmlformats.org/drawingml/2006/main" xmlns:p="http://schemas.openxmlformats.org/presentationml/2006/main" xmlns:r="http://schemas.openxmlformats.org/officeDocument/2006/relationships">
+  <p:cSld>
+    <p:spTree>
+      <p:nvGrpSpPr>
+        <p:cNvPr id="1" name=""/>
+        <p:cNvGrpSpPr/>
+        <p:nvPr/>
+      </p:nvGrpSpPr>
+      <p:grpSpPr/>
+      <p:sp>
+        <p:nvSpPr>
+          <p:cNvPr id="2" name="TextBox 1"/>
+          <p:cNvSpPr txBox="1"/>
+          <p:nvPr/>
+        </p:nvSpPr>
+        <p:spPr>
+          <a:xfrm>
+            <a:off x="457200" y="274320"/>
+            <a:ext cx="8229600" cy="640080"/>
+          </a:xfrm>
+          <a:prstGeom prst="rect">
+            <a:avLst/>
+          </a:prstGeom>
+          <a:noFill/>
+        </p:spPr>
+        <p:txBody>
+          <a:bodyPr wrap="square">
+            <a:spAutoFit/>
+          </a:bodyPr>
+          <a:lstStyle/>
+          <a:p>
+            <a:r>
+              <a:rPr sz="2200" b="1">
+                <a:solidFill>
+                  <a:srgbClr val="0B3D2E"/>
+                </a:solidFill>
+              </a:rPr>
+              <a:t>Diagrama de la clase</a:t>
+            </a:r>
+          </a:p>
+        </p:txBody>
+      </p:sp>
+      <p:pic>
+        <p:nvPicPr>
+          <p:cNvPr id="3" name="Picture 2" descr="fcf0491ccb9be6ff.png"/>
+          <p:cNvPicPr>
+            <a:picLocks noChangeAspect="1"/>
+          </p:cNvPicPr>
+          <p:nvPr/>
+        </p:nvPicPr>
+        <p:blipFill>
+          <a:blip r:embed="rId2"/>
+          <a:stretch>
+            <a:fillRect/>
+          </a:stretch>
+        </p:blipFill>
+        <p:spPr>
+          <a:xfrm>
+            <a:off x="842052" y="1097280"/>
+            <a:ext cx="7459896" cy="5303520"/>
+          </a:xfrm>
+          <a:prstGeom prst="rect">
+            <a:avLst/>
+          </a:prstGeom>
+        </p:spPr>
+      </p:pic>
     </p:spTree>
   </p:cSld>
   <p:clrMapOvr>
@@ -4122,7 +4498,7 @@
                   <a:srgbClr val="0B3D2E"/>
                 </a:solidFill>
               </a:rPr>
-              <a:t>📖 Definiciones y características</a:t>
+              <a:t>🧠 Explicación en profundidad</a:t>
             </a:r>
           </a:p>
         </p:txBody>
@@ -4160,97 +4536,97 @@
                   <a:srgbClr val="22282E"/>
                 </a:solidFill>
               </a:rPr>
-              <a:t>•  Format string bug: el usuario controla la cadena de formato de printf. Clave: CWE-134;</a:t>
-            </a:r>
-          </a:p>
-          <a:p>
-            <a:pPr>
-              <a:spcAft>
-                <a:spcPts val="600"/>
-              </a:spcAft>
-            </a:pPr>
-            <a:r>
-              <a:rPr sz="1500">
-                <a:solidFill>
-                  <a:srgbClr val="22282E"/>
-                </a:solidFill>
-              </a:rPr>
-              <a:t>•  permite lectura y escritura de memoria.</a:t>
-            </a:r>
-          </a:p>
-          <a:p>
-            <a:pPr>
-              <a:spcAft>
-                <a:spcPts val="600"/>
-              </a:spcAft>
-            </a:pPr>
-            <a:r>
-              <a:rPr sz="1500">
-                <a:solidFill>
-                  <a:srgbClr val="22282E"/>
-                </a:solidFill>
-              </a:rPr>
-              <a:t>•  %p/%x: vuelcan argumentos que printf cree recibir, en realidad valores de la pila. Clave:</a:t>
-            </a:r>
-          </a:p>
-          <a:p>
-            <a:pPr>
-              <a:spcAft>
-                <a:spcPts val="600"/>
-              </a:spcAft>
-            </a:pPr>
-            <a:r>
-              <a:rPr sz="1500">
-                <a:solidFill>
-                  <a:srgbClr val="22282E"/>
-                </a:solidFill>
-              </a:rPr>
-              <a:t>•  base del info leak.</a:t>
-            </a:r>
-          </a:p>
-          <a:p>
-            <a:pPr>
-              <a:spcAft>
-                <a:spcPts val="600"/>
-              </a:spcAft>
-            </a:pPr>
-            <a:r>
-              <a:rPr sz="1500">
-                <a:solidFill>
-                  <a:srgbClr val="22282E"/>
-                </a:solidFill>
-              </a:rPr>
-              <a:t>•  Offset del argumento: posición (%N$p) donde aparece tu buffer en la pila. Clave: se localiza</a:t>
-            </a:r>
-          </a:p>
-          <a:p>
-            <a:pPr>
-              <a:spcAft>
-                <a:spcPts val="600"/>
-              </a:spcAft>
-            </a:pPr>
-            <a:r>
-              <a:rPr sz="1500">
-                <a:solidFill>
-                  <a:srgbClr val="22282E"/>
-                </a:solidFill>
-              </a:rPr>
-              <a:t>•  enviando AAAA %p %p %p... y buscando 0x41414141.</a:t>
-            </a:r>
-          </a:p>
-          <a:p>
-            <a:pPr>
-              <a:spcAft>
-                <a:spcPts val="600"/>
-              </a:spcAft>
-            </a:pPr>
-            <a:r>
-              <a:rPr sz="1500">
-                <a:solidFill>
-                  <a:srgbClr val="22282E"/>
-                </a:solidFill>
-              </a:rPr>
-              <a:t>•  %n: escribe en la dirección apuntada el número de bytes ya impresos. Clave: convierte formato</a:t>
+              <a:t>•  La vulnerabilidad de format string nace de un uso incorrecto de printf y su familia. La forma</a:t>
+            </a:r>
+          </a:p>
+          <a:p>
+            <a:pPr>
+              <a:spcAft>
+                <a:spcPts val="600"/>
+              </a:spcAft>
+            </a:pPr>
+            <a:r>
+              <a:rPr sz="1500">
+                <a:solidFill>
+                  <a:srgbClr val="22282E"/>
+                </a:solidFill>
+              </a:rPr>
+              <a:t>•  correcta es printf("%s", entrada), con una cadena de formato fija y la entrada como argumento.</a:t>
+            </a:r>
+          </a:p>
+          <a:p>
+            <a:pPr>
+              <a:spcAft>
+                <a:spcPts val="600"/>
+              </a:spcAft>
+            </a:pPr>
+            <a:r>
+              <a:rPr sz="1500">
+                <a:solidFill>
+                  <a:srgbClr val="22282E"/>
+                </a:solidFill>
+              </a:rPr>
+              <a:t>•  La forma vulnerable es printf(entrada), pasando la entrada del usuario directamente como cadena</a:t>
+            </a:r>
+          </a:p>
+          <a:p>
+            <a:pPr>
+              <a:spcAft>
+                <a:spcPts val="600"/>
+              </a:spcAft>
+            </a:pPr>
+            <a:r>
+              <a:rPr sz="1500">
+                <a:solidFill>
+                  <a:srgbClr val="22282E"/>
+                </a:solidFill>
+              </a:rPr>
+              <a:t>•  de formato. La diferencia es enorme: si el usuario controla la cadena de formato, controla los</a:t>
+            </a:r>
+          </a:p>
+          <a:p>
+            <a:pPr>
+              <a:spcAft>
+                <a:spcPts val="600"/>
+              </a:spcAft>
+            </a:pPr>
+            <a:r>
+              <a:rPr sz="1500">
+                <a:solidFill>
+                  <a:srgbClr val="22282E"/>
+                </a:solidFill>
+              </a:rPr>
+              <a:t>•  especificadores (%x, %p, %s, %n), que le dan la capacidad de leer y —lo más grave—</a:t>
+            </a:r>
+          </a:p>
+          <a:p>
+            <a:pPr>
+              <a:spcAft>
+                <a:spcPts val="600"/>
+              </a:spcAft>
+            </a:pPr>
+            <a:r>
+              <a:rPr sz="1500">
+                <a:solidFill>
+                  <a:srgbClr val="22282E"/>
+                </a:solidFill>
+              </a:rPr>
+              <a:t>•  escribir en la memoria del proceso. Es un fallo doble: permite tanto la fuga de información como</a:t>
+            </a:r>
+          </a:p>
+          <a:p>
+            <a:pPr>
+              <a:spcAft>
+                <a:spcPts val="600"/>
+              </a:spcAft>
+            </a:pPr>
+            <a:r>
+              <a:rPr sz="1500">
+                <a:solidFill>
+                  <a:srgbClr val="22282E"/>
+                </a:solidFill>
+              </a:rPr>
+              <a:t>•  la escritura arbitraria, y por eso es una de las primitivas más versátiles del exploiting.</a:t>
             </a:r>
           </a:p>
         </p:txBody>
@@ -4301,7 +4677,7 @@
                   <a:srgbClr val="0B3D2E"/>
                 </a:solidFill>
               </a:rPr>
-              <a:t>🧰 Herramientas y preparación</a:t>
+              <a:t>📖 Definiciones y características</a:t>
             </a:r>
           </a:p>
         </p:txBody>
@@ -4339,52 +4715,97 @@
                   <a:srgbClr val="22282E"/>
                 </a:solidFill>
               </a:rPr>
-              <a:t>•  pip install pwntools</a:t>
-            </a:r>
-          </a:p>
-          <a:p>
-            <a:pPr>
-              <a:spcAft>
-                <a:spcPts val="600"/>
-              </a:spcAft>
-            </a:pPr>
-            <a:r>
-              <a:rPr sz="1500">
-                <a:solidFill>
-                  <a:srgbClr val="22282E"/>
-                </a:solidFill>
-              </a:rPr>
-              <a:t>•  gcc -fno-stack-protector -no-pie -o fmt fmt.c   # binario de práctica</a:t>
-            </a:r>
-          </a:p>
-          <a:p>
-            <a:pPr>
-              <a:spcAft>
-                <a:spcPts val="600"/>
-              </a:spcAft>
-            </a:pPr>
-            <a:r>
-              <a:rPr sz="1500">
-                <a:solidFill>
-                  <a:srgbClr val="22282E"/>
-                </a:solidFill>
-              </a:rPr>
-              <a:t>•  Ejemplo vulnerable fmt.c:</a:t>
-            </a:r>
-          </a:p>
-          <a:p>
-            <a:pPr>
-              <a:spcAft>
-                <a:spcPts val="600"/>
-              </a:spcAft>
-            </a:pPr>
-            <a:r>
-              <a:rPr sz="1500">
-                <a:solidFill>
-                  <a:srgbClr val="22282E"/>
-                </a:solidFill>
-              </a:rPr>
-              <a:t>•  int main(){ char b[128]; fgets(b,128,stdin); printf(b); return 0; }</a:t>
+              <a:t>•  Format string bug: el usuario controla la cadena de formato de printf. Clave: CWE-134;</a:t>
+            </a:r>
+          </a:p>
+          <a:p>
+            <a:pPr>
+              <a:spcAft>
+                <a:spcPts val="600"/>
+              </a:spcAft>
+            </a:pPr>
+            <a:r>
+              <a:rPr sz="1500">
+                <a:solidFill>
+                  <a:srgbClr val="22282E"/>
+                </a:solidFill>
+              </a:rPr>
+              <a:t>•  permite lectura y escritura de memoria.</a:t>
+            </a:r>
+          </a:p>
+          <a:p>
+            <a:pPr>
+              <a:spcAft>
+                <a:spcPts val="600"/>
+              </a:spcAft>
+            </a:pPr>
+            <a:r>
+              <a:rPr sz="1500">
+                <a:solidFill>
+                  <a:srgbClr val="22282E"/>
+                </a:solidFill>
+              </a:rPr>
+              <a:t>•  %p/%x: vuelcan argumentos que printf cree recibir, en realidad valores de la pila. Clave:</a:t>
+            </a:r>
+          </a:p>
+          <a:p>
+            <a:pPr>
+              <a:spcAft>
+                <a:spcPts val="600"/>
+              </a:spcAft>
+            </a:pPr>
+            <a:r>
+              <a:rPr sz="1500">
+                <a:solidFill>
+                  <a:srgbClr val="22282E"/>
+                </a:solidFill>
+              </a:rPr>
+              <a:t>•  base del info leak.</a:t>
+            </a:r>
+          </a:p>
+          <a:p>
+            <a:pPr>
+              <a:spcAft>
+                <a:spcPts val="600"/>
+              </a:spcAft>
+            </a:pPr>
+            <a:r>
+              <a:rPr sz="1500">
+                <a:solidFill>
+                  <a:srgbClr val="22282E"/>
+                </a:solidFill>
+              </a:rPr>
+              <a:t>•  Offset del argumento: posición (%N$p) donde aparece tu buffer en la pila. Clave: se localiza</a:t>
+            </a:r>
+          </a:p>
+          <a:p>
+            <a:pPr>
+              <a:spcAft>
+                <a:spcPts val="600"/>
+              </a:spcAft>
+            </a:pPr>
+            <a:r>
+              <a:rPr sz="1500">
+                <a:solidFill>
+                  <a:srgbClr val="22282E"/>
+                </a:solidFill>
+              </a:rPr>
+              <a:t>•  enviando AAAA %p %p %p... y buscando 0x41414141.</a:t>
+            </a:r>
+          </a:p>
+          <a:p>
+            <a:pPr>
+              <a:spcAft>
+                <a:spcPts val="600"/>
+              </a:spcAft>
+            </a:pPr>
+            <a:r>
+              <a:rPr sz="1500">
+                <a:solidFill>
+                  <a:srgbClr val="22282E"/>
+                </a:solidFill>
+              </a:rPr>
+              <a:t>•  %n: escribe en la dirección apuntada el número de bytes ya impresos. Clave: convierte formato</a:t>
             </a:r>
           </a:p>
         </p:txBody>
@@ -4435,7 +4856,7 @@
                   <a:srgbClr val="0B3D2E"/>
                 </a:solidFill>
               </a:rPr>
-              <a:t>🧪 Laboratorio guiado</a:t>
+              <a:t>📔 Glosario</a:t>
             </a:r>
           </a:p>
         </p:txBody>
@@ -4473,97 +4894,97 @@
                   <a:srgbClr val="22282E"/>
                 </a:solidFill>
               </a:rPr>
-              <a:t>•  Confirma la vulnerabilidad enviando %p %p %p %p: verás valores de la pila en vez del texto literal.</a:t>
-            </a:r>
-          </a:p>
-          <a:p>
-            <a:pPr>
-              <a:spcAft>
-                <a:spcPts val="600"/>
-              </a:spcAft>
-            </a:pPr>
-            <a:r>
-              <a:rPr sz="1500">
-                <a:solidFill>
-                  <a:srgbClr val="22282E"/>
-                </a:solidFill>
-              </a:rPr>
-              <a:t>•  Localiza el offset de tu buffer:</a:t>
-            </a:r>
-          </a:p>
-          <a:p>
-            <a:pPr>
-              <a:spcAft>
-                <a:spcPts val="600"/>
-              </a:spcAft>
-            </a:pPr>
-            <a:r>
-              <a:rPr sz="1500">
-                <a:solidFill>
-                  <a:srgbClr val="22282E"/>
-                </a:solidFill>
-              </a:rPr>
-              <a:t>•  printf 'AAAABBBB %1$p %2$p %3$p %4$p %5$p %6$p\n' | ./fmt</a:t>
-            </a:r>
-          </a:p>
-          <a:p>
-            <a:pPr>
-              <a:spcAft>
-                <a:spcPts val="600"/>
-              </a:spcAft>
-            </a:pPr>
-            <a:r>
-              <a:rPr sz="1500">
-                <a:solidFill>
-                  <a:srgbClr val="22282E"/>
-                </a:solidFill>
-              </a:rPr>
-              <a:t>•  Cuenta hasta ver 0x42424242... o 0x41414141; ese índice N es tu offset.</a:t>
-            </a:r>
-          </a:p>
-          <a:p>
-            <a:pPr>
-              <a:spcAft>
-                <a:spcPts val="600"/>
-              </a:spcAft>
-            </a:pPr>
-            <a:r>
-              <a:rPr sz="1500">
-                <a:solidFill>
-                  <a:srgbClr val="22282E"/>
-                </a:solidFill>
-              </a:rPr>
-              <a:t>•  Fuga de una dirección de la GOT para derrotar ASLR:</a:t>
-            </a:r>
-          </a:p>
-          <a:p>
-            <a:pPr>
-              <a:spcAft>
-                <a:spcPts val="600"/>
-              </a:spcAft>
-            </a:pPr>
-            <a:r>
-              <a:rPr sz="1500">
-                <a:solidFill>
-                  <a:srgbClr val="22282E"/>
-                </a:solidFill>
-              </a:rPr>
-              <a:t>•  from pwn import</a:t>
-            </a:r>
-          </a:p>
-          <a:p>
-            <a:pPr>
-              <a:spcAft>
-                <a:spcPts val="600"/>
-              </a:spcAft>
-            </a:pPr>
-            <a:r>
-              <a:rPr sz="1500">
-                <a:solidFill>
-                  <a:srgbClr val="22282E"/>
-                </a:solidFill>
-              </a:rPr>
-              <a:t>•  elf = context.binary = ELF("./fmt")</a:t>
+              <a:t>•  Término — Definición concisa</a:t>
+            </a:r>
+          </a:p>
+          <a:p>
+            <a:pPr>
+              <a:spcAft>
+                <a:spcPts val="600"/>
+              </a:spcAft>
+            </a:pPr>
+            <a:r>
+              <a:rPr sz="1500">
+                <a:solidFill>
+                  <a:srgbClr val="22282E"/>
+                </a:solidFill>
+              </a:rPr>
+              <a:t>•  Format string — Vulnerabilidad por pasar entrada como cadena de formato</a:t>
+            </a:r>
+          </a:p>
+          <a:p>
+            <a:pPr>
+              <a:spcAft>
+                <a:spcPts val="600"/>
+              </a:spcAft>
+            </a:pPr>
+            <a:r>
+              <a:rPr sz="1500">
+                <a:solidFill>
+                  <a:srgbClr val="22282E"/>
+                </a:solidFill>
+              </a:rPr>
+              <a:t>•  printf(entrada) — Uso vulnerable; lo correcto es printf("%s", entrada)</a:t>
+            </a:r>
+          </a:p>
+          <a:p>
+            <a:pPr>
+              <a:spcAft>
+                <a:spcPts val="600"/>
+              </a:spcAft>
+            </a:pPr>
+            <a:r>
+              <a:rPr sz="1500">
+                <a:solidFill>
+                  <a:srgbClr val="22282E"/>
+                </a:solidFill>
+              </a:rPr>
+              <a:t>•  Especificador — %x, %p, %s, %n de la familia printf</a:t>
+            </a:r>
+          </a:p>
+          <a:p>
+            <a:pPr>
+              <a:spcAft>
+                <a:spcPts val="600"/>
+              </a:spcAft>
+            </a:pPr>
+            <a:r>
+              <a:rPr sz="1500">
+                <a:solidFill>
+                  <a:srgbClr val="22282E"/>
+                </a:solidFill>
+              </a:rPr>
+              <a:t>•  %p / %x — Leen valores de la pila; base del info leak</a:t>
+            </a:r>
+          </a:p>
+          <a:p>
+            <a:pPr>
+              <a:spcAft>
+                <a:spcPts val="600"/>
+              </a:spcAft>
+            </a:pPr>
+            <a:r>
+              <a:rPr sz="1500">
+                <a:solidFill>
+                  <a:srgbClr val="22282E"/>
+                </a:solidFill>
+              </a:rPr>
+              <a:t>•  Volcado de pila — %p %p %p... imprime el contenido de la pila</a:t>
+            </a:r>
+          </a:p>
+          <a:p>
+            <a:pPr>
+              <a:spcAft>
+                <a:spcPts val="600"/>
+              </a:spcAft>
+            </a:pPr>
+            <a:r>
+              <a:rPr sz="1500">
+                <a:solidFill>
+                  <a:srgbClr val="22282E"/>
+                </a:solidFill>
+              </a:rPr>
+              <a:t>•  Offset de argumento — Índice %N$p que apunta a la entrada del atacante</a:t>
             </a:r>
           </a:p>
         </p:txBody>
@@ -4614,7 +5035,7 @@
                   <a:srgbClr val="0B3D2E"/>
                 </a:solidFill>
               </a:rPr>
-              <a:t>✍️ Ejercicios</a:t>
+              <a:t>🧰 Herramientas y preparación</a:t>
             </a:r>
           </a:p>
         </p:txBody>
@@ -4652,82 +5073,7 @@
                   <a:srgbClr val="22282E"/>
                 </a:solidFill>
               </a:rPr>
-              <a:t>•  Determina el offset del argumento controlado en tu binario.</a:t>
-            </a:r>
-          </a:p>
-          <a:p>
-            <a:pPr>
-              <a:spcAft>
-                <a:spcPts val="600"/>
-              </a:spcAft>
-            </a:pPr>
-            <a:r>
-              <a:rPr sz="1500">
-                <a:solidFill>
-                  <a:srgbClr val="22282E"/>
-                </a:solidFill>
-              </a:rPr>
-              <a:t>•  Filtra el stack canary de un binario con canary usando %p.</a:t>
-            </a:r>
-          </a:p>
-          <a:p>
-            <a:pPr>
-              <a:spcAft>
-                <a:spcPts val="600"/>
-              </a:spcAft>
-            </a:pPr>
-            <a:r>
-              <a:rPr sz="1500">
-                <a:solidFill>
-                  <a:srgbClr val="22282E"/>
-                </a:solidFill>
-              </a:rPr>
-              <a:t>•  Escribe el valor 0xdeadbeef en una variable global con %n.</a:t>
-            </a:r>
-          </a:p>
-          <a:p>
-            <a:pPr>
-              <a:spcAft>
-                <a:spcPts val="600"/>
-              </a:spcAft>
-            </a:pPr>
-            <a:r>
-              <a:rPr sz="1500">
-                <a:solidFill>
-                  <a:srgbClr val="22282E"/>
-                </a:solidFill>
-              </a:rPr>
-              <a:t>•  Sobrescribe la GOT de puts con la dirección de win.</a:t>
-            </a:r>
-          </a:p>
-          <a:p>
-            <a:pPr>
-              <a:spcAft>
-                <a:spcPts val="600"/>
-              </a:spcAft>
-            </a:pPr>
-            <a:r>
-              <a:rPr sz="1500">
-                <a:solidFill>
-                  <a:srgbClr val="22282E"/>
-                </a:solidFill>
-              </a:rPr>
-              <a:t>•  Compara payload manual vs fmtstrpayload.</a:t>
-            </a:r>
-          </a:p>
-          <a:p>
-            <a:pPr>
-              <a:spcAft>
-                <a:spcPts val="600"/>
-              </a:spcAft>
-            </a:pPr>
-            <a:r>
-              <a:rPr sz="1500">
-                <a:solidFill>
-                  <a:srgbClr val="22282E"/>
-                </a:solidFill>
-              </a:rPr>
-              <a:t>•  Recompila con -DFORTIFYSOURCE=2 -O2 y explica qué cambia.</a:t>
+              <a:t>•  Ejemplo vulnerable fmt.c:</a:t>
             </a:r>
           </a:p>
         </p:txBody>
@@ -4778,7 +5124,7 @@
                   <a:srgbClr val="0B3D2E"/>
                 </a:solidFill>
               </a:rPr>
-              <a:t>📝 Reto verificable</a:t>
+              <a:t>🧪 Laboratorio guiado</a:t>
             </a:r>
           </a:p>
         </p:txBody>
@@ -4816,52 +5162,97 @@
                   <a:srgbClr val="22282E"/>
                 </a:solidFill>
               </a:rPr>
-              <a:t>•  Entrega un exploit que, mediante una única cadena de formato, sobrescriba una entrada de la GOT para</a:t>
-            </a:r>
-          </a:p>
-          <a:p>
-            <a:pPr>
-              <a:spcAft>
-                <a:spcPts val="600"/>
-              </a:spcAft>
-            </a:pPr>
-            <a:r>
-              <a:rPr sz="1500">
-                <a:solidFill>
-                  <a:srgbClr val="22282E"/>
-                </a:solidFill>
-              </a:rPr>
-              <a:t>•  desviar la ejecución a win().</a:t>
-            </a:r>
-          </a:p>
-          <a:p>
-            <a:pPr>
-              <a:spcAft>
-                <a:spcPts val="600"/>
-              </a:spcAft>
-            </a:pPr>
-            <a:r>
-              <a:rPr sz="1500">
-                <a:solidFill>
-                  <a:srgbClr val="22282E"/>
-                </a:solidFill>
-              </a:rPr>
-              <a:t>•  Criterio de aceptación: al ejecutar el binario con tu entrada, se llama a win() (mensaje visible),</a:t>
-            </a:r>
-          </a:p>
-          <a:p>
-            <a:pPr>
-              <a:spcAft>
-                <a:spcPts val="600"/>
-              </a:spcAft>
-            </a:pPr>
-            <a:r>
-              <a:rPr sz="1500">
-                <a:solidFill>
-                  <a:srgbClr val="22282E"/>
-                </a:solidFill>
-              </a:rPr>
-              <a:t>•  y muestras en GDB la entrada GOT modificada.</a:t>
+              <a:t>•  Confirma la vulnerabilidad enviando %p %p %p %p: verás valores de la pila en vez del texto literal.</a:t>
+            </a:r>
+          </a:p>
+          <a:p>
+            <a:pPr>
+              <a:spcAft>
+                <a:spcPts val="600"/>
+              </a:spcAft>
+            </a:pPr>
+            <a:r>
+              <a:rPr sz="1500">
+                <a:solidFill>
+                  <a:srgbClr val="22282E"/>
+                </a:solidFill>
+              </a:rPr>
+              <a:t>•  Localiza el offset de tu buffer:</a:t>
+            </a:r>
+          </a:p>
+          <a:p>
+            <a:pPr>
+              <a:spcAft>
+                <a:spcPts val="600"/>
+              </a:spcAft>
+            </a:pPr>
+            <a:r>
+              <a:rPr sz="1500">
+                <a:solidFill>
+                  <a:srgbClr val="22282E"/>
+                </a:solidFill>
+              </a:rPr>
+              <a:t>•  Cuenta hasta ver 0x42424242... o 0x41414141; ese índice N es tu offset.</a:t>
+            </a:r>
+          </a:p>
+          <a:p>
+            <a:pPr>
+              <a:spcAft>
+                <a:spcPts val="600"/>
+              </a:spcAft>
+            </a:pPr>
+            <a:r>
+              <a:rPr sz="1500">
+                <a:solidFill>
+                  <a:srgbClr val="22282E"/>
+                </a:solidFill>
+              </a:rPr>
+              <a:t>•  Fuga de una dirección de la GOT para derrotar ASLR:</a:t>
+            </a:r>
+          </a:p>
+          <a:p>
+            <a:pPr>
+              <a:spcAft>
+                <a:spcPts val="600"/>
+              </a:spcAft>
+            </a:pPr>
+            <a:r>
+              <a:rPr sz="1500">
+                <a:solidFill>
+                  <a:srgbClr val="22282E"/>
+                </a:solidFill>
+              </a:rPr>
+              <a:t>•  Escritura arbitraria con %n para sobrescribir la GOT (printf→system) usando pwntools:</a:t>
+            </a:r>
+          </a:p>
+          <a:p>
+            <a:pPr>
+              <a:spcAft>
+                <a:spcPts val="600"/>
+              </a:spcAft>
+            </a:pPr>
+            <a:r>
+              <a:rPr sz="1500">
+                <a:solidFill>
+                  <a:srgbClr val="22282E"/>
+                </a:solidFill>
+              </a:rPr>
+              <a:t>•  (Ajusta el offset 6 al que hallaste en el paso 2.)</a:t>
+            </a:r>
+          </a:p>
+          <a:p>
+            <a:pPr>
+              <a:spcAft>
+                <a:spcPts val="600"/>
+              </a:spcAft>
+            </a:pPr>
+            <a:r>
+              <a:rPr sz="1500">
+                <a:solidFill>
+                  <a:srgbClr val="22282E"/>
+                </a:solidFill>
+              </a:rPr>
+              <a:t>•  Verifica en GDB que la entrada de la GOT cambió (x/gx &amp;printf@got).</a:t>
             </a:r>
           </a:p>
         </p:txBody>
